--- a/docs/reports/project-status-2026-06-07.pptx
+++ b/docs/reports/project-status-2026-06-07.pptx
@@ -2629,8 +2629,8 @@
         </p:nvSpPr>
         <p:spPr>
           <a:xfrm>
-            <a:off x="8092440" y="4462272"/>
-            <a:ext cx="3063240" cy="786384"/>
+            <a:off x="6720840" y="4462272"/>
+            <a:ext cx="4572000" cy="786384"/>
           </a:xfrm>
           <a:prstGeom prst="roundRect">
             <a:avLst>
@@ -2660,8 +2660,8 @@
         </p:nvSpPr>
         <p:spPr>
           <a:xfrm>
-            <a:off x="8302752" y="4736592"/>
-            <a:ext cx="2651760" cy="128016"/>
+            <a:off x="6903720" y="4736592"/>
+            <a:ext cx="4206240" cy="128016"/>
           </a:xfrm>
           <a:prstGeom prst="rect">
             <a:avLst/>
@@ -2677,7 +2677,7 @@
               <a:buNone/>
             </a:pPr>
             <a:r>
-              <a:rPr lang="en-US" sz="970" dirty="0">
+              <a:rPr lang="en-US" sz="850" dirty="0">
                 <a:solidFill>
                   <a:srgbClr val="E8FFFC"/>
                 </a:solidFill>
